--- a/ground-vehicle/docs/courses/beginner-ps3/l3_controller_programming.pptx
+++ b/ground-vehicle/docs/courses/beginner-ps3/l3_controller_programming.pptx
@@ -903,7 +903,7 @@
               <a:rPr sz="1200">
                 <a:latin typeface="Calibri"/>
               </a:rPr>
-              <a:t>On the Switch track, step 7 gives them the MY_CONTROLLER line they need for the rest of the day. Make sure it is written down or pasted immediately - it is easy to lose.</a:t>
+              <a:t>Step 1 is the first time they set the address, and they will do it again in every controller program from here on. The sketch prints which address it is listening as. If that still ends in 00, that is why nothing connects.</a:t>
             </a:r>
           </a:p>
           <a:p>
@@ -912,6 +912,30 @@
                 <a:latin typeface="Calibri"/>
               </a:rPr>
               <a:t>Walk round with a list of button names. Somebody will find a button that prints nothing, and that is usually a third-party pad rather than a fault.</a:t>
+            </a:r>
+          </a:p>
+          <a:p>
+            <a:r>
+              <a:rPr sz="1200">
+                <a:latin typeface="Calibri"/>
+              </a:rPr>
+              <a:t>The sticks print at most four times a second, on purpose - PRINT_MS in the sketch. Anybody who wants to see why can set it to 20 and watch the window scroll away.</a:t>
+            </a:r>
+          </a:p>
+          <a:p>
+            <a:r>
+              <a:rPr sz="1200">
+                <a:latin typeface="Calibri"/>
+              </a:rPr>
+              <a:t>ANSWER, Y axis: pushing UP gives a NEGATIVE number, down a positive one (-128 to +127). That is why the driving code puts a minus sign in front of the Y reading.</a:t>
+            </a:r>
+          </a:p>
+          <a:p>
+            <a:r>
+              <a:rPr sz="1200">
+                <a:latin typeface="Calibri"/>
+              </a:rPr>
+              <a:t>ANSWER, drift: it depends on the pad, which is the point. A worn stick usually rests a few counts off zero. Collect the numbers from the room - the biggest one is what the deadzone has to beat, and it is the next section.</a:t>
             </a:r>
           </a:p>
         </p:txBody>
@@ -1162,7 +1186,7 @@
               <a:rPr sz="1200">
                 <a:latin typeface="Calibri"/>
               </a:rPr>
-              <a:t>Ask why the line does not start at zero. The answer - a stick at rest is never exactly centered - is worth getting from the room rather than telling them.</a:t>
+              <a:t>Ask why the ramp does not start at the origin. The answer - a stick at rest is never exactly centered - is worth getting from the room rather than telling them.</a:t>
             </a:r>
           </a:p>
           <a:p>
@@ -1170,7 +1194,7 @@
               <a:rPr sz="1200">
                 <a:latin typeface="Calibri"/>
               </a:rPr>
-              <a:t>The jump at the deadzone edge is deliberate: below the minimum duty the motor buzzes instead of turning, so the map skips straight past it.</a:t>
+              <a:t>With MOTOR_MIN at 0 the ramp leaves the deadzone edge at zero speed, with no jump. Step 5 of the next activity sets MOTOR_MIN to 60, and then the speed jumps from 0 straight to 60 at the edge. That is what a speed floor looks like.</a:t>
             </a:r>
           </a:p>
           <a:p>
@@ -1259,6 +1283,14 @@
               <a:rPr sz="1200">
                 <a:latin typeface="Calibri"/>
               </a:rPr>
+              <a:t>Make them work the middle one out before you say it. Half the stick is NOT exactly half speed, because map() works in whole numbers and throws the fraction away - the 7 / 2 trap from Lesson 1, in a place where it actually matters.</a:t>
+            </a:r>
+          </a:p>
+          <a:p>
+            <a:r>
+              <a:rPr sz="1200">
+                <a:latin typeface="Calibri"/>
+              </a:rPr>
               <a:t>The important subtlety is on the last line: the low end is the DEADZONE, not zero. Without that, the leftover travel could never reach full speed.</a:t>
             </a:r>
           </a:p>
@@ -1375,6 +1407,22 @@
               <a:t>Step 5 previews MOTOR_MIN, which they met in Lesson 2. The jump the instant they leave the deadzone is what a raised minimum feels like.</a:t>
             </a:r>
           </a:p>
+          <a:p>
+            <a:r>
+              <a:rPr sz="1200">
+                <a:latin typeface="Calibri"/>
+              </a:rPr>
+              <a:t>ANSWER, deadzone 0: it would creep. The resting drift is no longer thrown away, so it turns into a small motor speed - the speed column stops reading 0 even with nobody touching the pad.</a:t>
+            </a:r>
+          </a:p>
+          <a:p>
+            <a:r>
+              <a:rPr sz="1200">
+                <a:latin typeface="Calibri"/>
+              </a:rPr>
+              <a:t>ANSWER, MOTOR_MIN = 60: the speed jumps from 0 straight to 60 the moment the stick leaves the deadzone, instead of starting from 0. You want it for motors that will not turn at all below some duty - the number they found with l2b_speed_ramp. These vehicles drive fine without it, which is why it ships at 0.</a:t>
+            </a:r>
+          </a:p>
         </p:txBody>
       </p:sp>
       <p:sp>
@@ -1599,7 +1647,7 @@
               <a:rPr sz="1200">
                 <a:latin typeface="Calibri"/>
               </a:rPr>
-              <a:t>The half-power steering choice is a design decision, not a limitation. Explain the reasoning: full-power steering spins faster than anybody can correct for.</a:t>
+              <a:t>The 75% steering limit is a design decision, not a limitation. Explain the reasoning: full-power steering spins faster than anybody can correct for.</a:t>
             </a:r>
           </a:p>
           <a:p>
@@ -1828,6 +1876,14 @@
               <a:t>Give this the full thirty minutes. It is the payoff for three lessons of groundwork.</a:t>
             </a:r>
           </a:p>
+          <a:p>
+            <a:r>
+              <a:rPr sz="1200">
+                <a:latin typeface="Calibri"/>
+              </a:rPr>
+              <a:t>ANSWER: the wheels stopped within about a second of the link dropping, and picked up again when the pad came back in range. The four lines are the if at the very top of loop(): no controller, so drive(0, 0) and return before anything else runs.</a:t>
+            </a:r>
+          </a:p>
         </p:txBody>
       </p:sp>
       <p:sp>
@@ -1958,6 +2014,14 @@
               <a:t>Give this the full thirty minutes. It is the payoff for three lessons of groundwork.</a:t>
             </a:r>
           </a:p>
+          <a:p>
+            <a:r>
+              <a:rPr sz="1200">
+                <a:latin typeface="Calibri"/>
+              </a:rPr>
+              <a:t>ANSWER: the wheels stopped within about a second of the link dropping, and picked up again when the pad came back in range. The four lines are the if at the very top of loop(): no controller, so drive(0, 0) and return before anything else runs.</a:t>
+            </a:r>
+          </a:p>
         </p:txBody>
       </p:sp>
       <p:sp>
@@ -2088,6 +2152,14 @@
               <a:t>Give this the full thirty minutes. It is the payoff for three lessons of groundwork.</a:t>
             </a:r>
           </a:p>
+          <a:p>
+            <a:r>
+              <a:rPr sz="1200">
+                <a:latin typeface="Calibri"/>
+              </a:rPr>
+              <a:t>ANSWER: the wheels stopped within about a second of the link dropping, and picked up again when the pad came back in range. The four lines are the if at the very top of loop(): no controller, so drive(0, 0) and return before anything else runs.</a:t>
+            </a:r>
+          </a:p>
         </p:txBody>
       </p:sp>
       <p:sp>
@@ -2700,7 +2772,7 @@
               <a:rPr sz="1200">
                 <a:latin typeface="Calibri"/>
               </a:rPr>
-              <a:t>Kevin's instruction, 2026-09-05: we program and label the controllers, so do not make students worry about how. Tell them what the sticker means and move on.</a:t>
+              <a:t>Kevin's instruction, 2026-09-05: we program and label the controllers, so students never run SixaxisPairTool. What they DO have to do is copy the sticker number into each program they upload: l3a, l3b, l3c, l5b, l5c and pathfinder_ps3.</a:t>
             </a:r>
           </a:p>
           <a:p>
@@ -2708,7 +2780,7 @@
               <a:rPr sz="1200">
                 <a:latin typeface="Calibri"/>
               </a:rPr>
-              <a:t>Say the odd part plainly all the same: on a PS3 pad it is the CONTROLLER that is told which vehicle to talk to, not the vehicle that chooses a controller.</a:t>
+              <a:t>Say the odd part plainly: on a PS3 pad it is the CONTROLLER that is told which address to talk to. The sketch makes the ESP32 answer to that address.</a:t>
             </a:r>
           </a:p>
           <a:p>
@@ -2716,7 +2788,7 @@
               <a:rPr sz="1200">
                 <a:latin typeface="Calibri"/>
               </a:rPr>
-              <a:t>FOR YOU, NOT FOR THE SLIDE - how the labelling is done. Plug the pad into a Windows PC over USB, open SixaxisPairTool, type the address in and click Update, then put the same address into PS3_MAC_ADDRESS in the sketch. The scheme is 02:02:03:04:05:NN, where NN is the vehicle number.</a:t>
+              <a:t>Why every sketch ships ending in 00: with a real address as the default, a student who forgot to change it would drive whichever vehicle owns that pad. Now forgetting means nothing connects, and the Serial Monitor prints the address the sketch is listening as.</a:t>
             </a:r>
           </a:p>
           <a:p>
@@ -2724,7 +2796,15 @@
               <a:rPr sz="1200">
                 <a:latin typeface="Calibri"/>
               </a:rPr>
-              <a:t>Also for you: the first pair of digits must be EVEN. An odd one silently fails to connect, which is a very confusing way to spend an afternoon.</a:t>
+              <a:t>FOR YOU, NOT FOR THE SLIDE - how the labelling is done. Plug the pad into a Windows PC over USB, open SixaxisPairTool, type 02:02:03:04:05:NN and click Update, then put NN on a sticker on the pad.</a:t>
+            </a:r>
+          </a:p>
+          <a:p>
+            <a:r>
+              <a:rPr sz="1200">
+                <a:latin typeface="Calibri"/>
+              </a:rPr>
+              <a:t>Also for you: keep the first pair of digits EVEN - 02 is what we use. An odd one is not an ordinary device address and failed silently with the original library, which is a very confusing way to spend an afternoon.</a:t>
             </a:r>
           </a:p>
           <a:p>
@@ -9722,42 +9802,42 @@
                 <a:spcPct val="100000"/>
               </a:lnSpc>
               <a:spcAft>
-                <a:spcPts val="800"/>
-              </a:spcAft>
-              <a:defRPr sz="1900" b="0">
-                <a:solidFill>
-                  <a:srgbClr val="222222"/>
-                </a:solidFill>
-                <a:latin typeface="Calibri"/>
-              </a:defRPr>
-            </a:pPr>
-            <a:r>
-              <a:rPr sz="1900" b="0">
-                <a:solidFill>
-                  <a:srgbClr val="222222"/>
-                </a:solidFill>
-                <a:latin typeface="Calibri"/>
-              </a:rPr>
-              <a:t>1.  Upload it and open the Serial Monitor.</a:t>
-            </a:r>
-          </a:p>
-          <a:p>
-            <a:pPr algn="l">
-              <a:lnSpc>
-                <a:spcPct val="100000"/>
-              </a:lnSpc>
-              <a:spcAft>
-                <a:spcPts val="800"/>
-              </a:spcAft>
-              <a:defRPr sz="1900" b="0">
-                <a:solidFill>
-                  <a:srgbClr val="222222"/>
-                </a:solidFill>
-                <a:latin typeface="Calibri"/>
-              </a:defRPr>
-            </a:pPr>
-            <a:r>
-              <a:rPr sz="1900" b="0">
+                <a:spcPts val="400"/>
+              </a:spcAft>
+              <a:defRPr sz="1800" b="0">
+                <a:solidFill>
+                  <a:srgbClr val="222222"/>
+                </a:solidFill>
+                <a:latin typeface="Calibri"/>
+              </a:defRPr>
+            </a:pPr>
+            <a:r>
+              <a:rPr sz="1800" b="0">
+                <a:solidFill>
+                  <a:srgbClr val="222222"/>
+                </a:solidFill>
+                <a:latin typeface="Calibri"/>
+              </a:rPr>
+              <a:t>1.  Set PS3_MAC_ADDRESS to the number on your controller's sticker. Upload, and open the Serial Monitor.</a:t>
+            </a:r>
+          </a:p>
+          <a:p>
+            <a:pPr algn="l">
+              <a:lnSpc>
+                <a:spcPct val="100000"/>
+              </a:lnSpc>
+              <a:spcAft>
+                <a:spcPts val="400"/>
+              </a:spcAft>
+              <a:defRPr sz="1800" b="0">
+                <a:solidFill>
+                  <a:srgbClr val="222222"/>
+                </a:solidFill>
+                <a:latin typeface="Calibri"/>
+              </a:defRPr>
+            </a:pPr>
+            <a:r>
+              <a:rPr sz="1800" b="0">
                 <a:solidFill>
                   <a:srgbClr val="222222"/>
                 </a:solidFill>
@@ -9772,17 +9852,17 @@
                 <a:spcPct val="100000"/>
               </a:lnSpc>
               <a:spcAft>
-                <a:spcPts val="800"/>
-              </a:spcAft>
-              <a:defRPr sz="1900" b="0">
-                <a:solidFill>
-                  <a:srgbClr val="222222"/>
-                </a:solidFill>
-                <a:latin typeface="Calibri"/>
-              </a:defRPr>
-            </a:pPr>
-            <a:r>
-              <a:rPr sz="1900" b="0">
+                <a:spcPts val="400"/>
+              </a:spcAft>
+              <a:defRPr sz="1800" b="0">
+                <a:solidFill>
+                  <a:srgbClr val="222222"/>
+                </a:solidFill>
+                <a:latin typeface="Calibri"/>
+              </a:defRPr>
+            </a:pPr>
+            <a:r>
+              <a:rPr sz="1800" b="0">
                 <a:solidFill>
                   <a:srgbClr val="222222"/>
                 </a:solidFill>
@@ -9797,17 +9877,17 @@
                 <a:spcPct val="100000"/>
               </a:lnSpc>
               <a:spcAft>
-                <a:spcPts val="800"/>
-              </a:spcAft>
-              <a:defRPr sz="1900" b="0">
-                <a:solidFill>
-                  <a:srgbClr val="222222"/>
-                </a:solidFill>
-                <a:latin typeface="Calibri"/>
-              </a:defRPr>
-            </a:pPr>
-            <a:r>
-              <a:rPr sz="1900" b="0">
+                <a:spcPts val="400"/>
+              </a:spcAft>
+              <a:defRPr sz="1800" b="0">
+                <a:solidFill>
+                  <a:srgbClr val="222222"/>
+                </a:solidFill>
+                <a:latin typeface="Calibri"/>
+              </a:defRPr>
+            </a:pPr>
+            <a:r>
+              <a:rPr sz="1800" b="0">
                 <a:solidFill>
                   <a:srgbClr val="222222"/>
                 </a:solidFill>
@@ -9822,17 +9902,17 @@
                 <a:spcPct val="100000"/>
               </a:lnSpc>
               <a:spcAft>
-                <a:spcPts val="800"/>
-              </a:spcAft>
-              <a:defRPr sz="1900" b="0">
-                <a:solidFill>
-                  <a:srgbClr val="222222"/>
-                </a:solidFill>
-                <a:latin typeface="Calibri"/>
-              </a:defRPr>
-            </a:pPr>
-            <a:r>
-              <a:rPr sz="1900" b="0">
+                <a:spcPts val="400"/>
+              </a:spcAft>
+              <a:defRPr sz="1800" b="0">
+                <a:solidFill>
+                  <a:srgbClr val="222222"/>
+                </a:solidFill>
+                <a:latin typeface="Calibri"/>
+              </a:defRPr>
+            </a:pPr>
+            <a:r>
+              <a:rPr sz="1800" b="0">
                 <a:solidFill>
                   <a:srgbClr val="222222"/>
                 </a:solidFill>
@@ -9847,17 +9927,17 @@
                 <a:spcPct val="100000"/>
               </a:lnSpc>
               <a:spcAft>
-                <a:spcPts val="800"/>
-              </a:spcAft>
-              <a:defRPr sz="1900" b="0">
-                <a:solidFill>
-                  <a:srgbClr val="222222"/>
-                </a:solidFill>
-                <a:latin typeface="Calibri"/>
-              </a:defRPr>
-            </a:pPr>
-            <a:r>
-              <a:rPr sz="1900" b="0">
+                <a:spcPts val="400"/>
+              </a:spcAft>
+              <a:defRPr sz="1800" b="0">
+                <a:solidFill>
+                  <a:srgbClr val="222222"/>
+                </a:solidFill>
+                <a:latin typeface="Calibri"/>
+              </a:defRPr>
+            </a:pPr>
+            <a:r>
+              <a:rPr sz="1800" b="0">
                 <a:solidFill>
                   <a:srgbClr val="222222"/>
                 </a:solidFill>
@@ -9872,17 +9952,17 @@
                 <a:spcPct val="100000"/>
               </a:lnSpc>
               <a:spcAft>
-                <a:spcPts val="800"/>
-              </a:spcAft>
-              <a:defRPr sz="1900" b="0">
-                <a:solidFill>
-                  <a:srgbClr val="222222"/>
-                </a:solidFill>
-                <a:latin typeface="Calibri"/>
-              </a:defRPr>
-            </a:pPr>
-            <a:r>
-              <a:rPr sz="1900" b="0">
+                <a:spcPts val="400"/>
+              </a:spcAft>
+              <a:defRPr sz="1800" b="0">
+                <a:solidFill>
+                  <a:srgbClr val="222222"/>
+                </a:solidFill>
+                <a:latin typeface="Calibri"/>
+              </a:defRPr>
+            </a:pPr>
+            <a:r>
+              <a:rPr sz="1800" b="0">
                 <a:solidFill>
                   <a:srgbClr val="222222"/>
                 </a:solidFill>
@@ -9950,7 +10030,7 @@
         <p:spPr>
           <a:xfrm>
             <a:off x="7163537" y="2304288"/>
-            <a:ext cx="4525238" cy="1360833"/>
+            <a:ext cx="4525238" cy="1672143"/>
           </a:xfrm>
           <a:prstGeom prst="rect">
             <a:avLst/>
@@ -9970,21 +10050,21 @@
               <a:spcAft>
                 <a:spcPts val="300"/>
               </a:spcAft>
-              <a:defRPr sz="2600" b="0">
-                <a:solidFill>
-                  <a:srgbClr val="222222"/>
-                </a:solidFill>
-                <a:latin typeface="Calibri"/>
-              </a:defRPr>
-            </a:pPr>
-            <a:r>
-              <a:rPr sz="2600" b="0">
-                <a:solidFill>
-                  <a:srgbClr val="222222"/>
-                </a:solidFill>
-                <a:latin typeface="Calibri"/>
-              </a:rPr>
-              <a:t>A line for every press, every release, and every stick movement.</a:t>
+              <a:defRPr sz="2500" b="0">
+                <a:solidFill>
+                  <a:srgbClr val="222222"/>
+                </a:solidFill>
+                <a:latin typeface="Calibri"/>
+              </a:defRPr>
+            </a:pPr>
+            <a:r>
+              <a:rPr sz="2500" b="0">
+                <a:solidFill>
+                  <a:srgbClr val="222222"/>
+                </a:solidFill>
+                <a:latin typeface="Calibri"/>
+              </a:rPr>
+              <a:t>A line for every press and every release, and up to four lines a second while a stick moves.</a:t>
             </a:r>
           </a:p>
         </p:txBody>
@@ -9997,7 +10077,7 @@
         </p:nvSpPr>
         <p:spPr>
           <a:xfrm>
-            <a:off x="7163537" y="3738273"/>
+            <a:off x="7163537" y="4049583"/>
             <a:ext cx="4525238" cy="365760"/>
           </a:xfrm>
           <a:prstGeom prst="rect">
@@ -10045,8 +10125,8 @@
         </p:nvSpPr>
         <p:spPr>
           <a:xfrm>
-            <a:off x="7163537" y="4140609"/>
-            <a:ext cx="4525238" cy="2123030"/>
+            <a:off x="7163537" y="4451919"/>
+            <a:ext cx="4525238" cy="1811720"/>
           </a:xfrm>
           <a:prstGeom prst="rect">
             <a:avLst/>
@@ -10066,15 +10146,15 @@
               <a:spcAft>
                 <a:spcPts val="300"/>
               </a:spcAft>
-              <a:defRPr sz="2500" b="0">
-                <a:solidFill>
-                  <a:srgbClr val="222222"/>
-                </a:solidFill>
-                <a:latin typeface="Calibri"/>
-              </a:defRPr>
-            </a:pPr>
-            <a:r>
-              <a:rPr sz="2500" b="0">
+              <a:defRPr sz="2400" b="0">
+                <a:solidFill>
+                  <a:srgbClr val="222222"/>
+                </a:solidFill>
+                <a:latin typeface="Calibri"/>
+              </a:defRPr>
+            </a:pPr>
+            <a:r>
+              <a:rPr sz="2400" b="0">
                 <a:solidFill>
                   <a:srgbClr val="222222"/>
                 </a:solidFill>
@@ -10091,15 +10171,15 @@
               <a:spcAft>
                 <a:spcPts val="300"/>
               </a:spcAft>
-              <a:defRPr sz="2500" b="0">
-                <a:solidFill>
-                  <a:srgbClr val="222222"/>
-                </a:solidFill>
-                <a:latin typeface="Calibri"/>
-              </a:defRPr>
-            </a:pPr>
-            <a:r>
-              <a:rPr sz="2500" b="0">
+              <a:defRPr sz="2400" b="0">
+                <a:solidFill>
+                  <a:srgbClr val="222222"/>
+                </a:solidFill>
+                <a:latin typeface="Calibri"/>
+              </a:defRPr>
+            </a:pPr>
+            <a:r>
+              <a:rPr sz="2400" b="0">
                 <a:solidFill>
                   <a:srgbClr val="222222"/>
                 </a:solidFill>
@@ -12849,7 +12929,7 @@
                 </a:solidFill>
                 <a:latin typeface="Consolas"/>
               </a:rPr>
-              <a:t>map(63, 0, 63, 0, 255)   -&gt;  127</a:t>
+              <a:t>map(63, 0, 127, 0, 255)   -&gt;  126</a:t>
             </a:r>
           </a:p>
           <a:p>
@@ -13035,17 +13115,17 @@
                 <a:spcPct val="100000"/>
               </a:lnSpc>
               <a:spcAft>
-                <a:spcPts val="700"/>
-              </a:spcAft>
-              <a:defRPr sz="2100" b="0">
-                <a:solidFill>
-                  <a:srgbClr val="222222"/>
-                </a:solidFill>
-                <a:latin typeface="Calibri"/>
-              </a:defRPr>
-            </a:pPr>
-            <a:r>
-              <a:rPr sz="2100" b="0">
+                <a:spcPts val="600"/>
+              </a:spcAft>
+              <a:defRPr sz="1800" b="0">
+                <a:solidFill>
+                  <a:srgbClr val="222222"/>
+                </a:solidFill>
+                <a:latin typeface="Calibri"/>
+              </a:defRPr>
+            </a:pPr>
+            <a:r>
+              <a:rPr sz="1800" b="0">
                 <a:solidFill>
                   <a:srgbClr val="222222"/>
                 </a:solidFill>
@@ -13060,17 +13140,42 @@
                 <a:spcPct val="100000"/>
               </a:lnSpc>
               <a:spcAft>
-                <a:spcPts val="700"/>
-              </a:spcAft>
-              <a:defRPr sz="2100" b="0">
-                <a:solidFill>
-                  <a:srgbClr val="222222"/>
-                </a:solidFill>
-                <a:latin typeface="Calibri"/>
-              </a:defRPr>
-            </a:pPr>
-            <a:r>
-              <a:rPr sz="2100" b="0">
+                <a:spcPts val="600"/>
+              </a:spcAft>
+              <a:defRPr sz="1800" b="0">
+                <a:solidFill>
+                  <a:srgbClr val="222222"/>
+                </a:solidFill>
+                <a:latin typeface="Calibri"/>
+              </a:defRPr>
+            </a:pPr>
+            <a:r>
+              <a:rPr sz="1800" b="0">
+                <a:solidFill>
+                  <a:srgbClr val="222222"/>
+                </a:solidFill>
+                <a:latin typeface="Calibri"/>
+              </a:rPr>
+              <a:t>It works in WHOLE numbers. 63 x 255 / 127 is 126.496..., and the fraction is thrown away - not rounded - just like 7 / 2 in Lesson 1.</a:t>
+            </a:r>
+          </a:p>
+          <a:p>
+            <a:pPr algn="l">
+              <a:lnSpc>
+                <a:spcPct val="100000"/>
+              </a:lnSpc>
+              <a:spcAft>
+                <a:spcPts val="600"/>
+              </a:spcAft>
+              <a:defRPr sz="1800" b="0">
+                <a:solidFill>
+                  <a:srgbClr val="222222"/>
+                </a:solidFill>
+                <a:latin typeface="Calibri"/>
+              </a:defRPr>
+            </a:pPr>
+            <a:r>
+              <a:rPr sz="1800" b="0">
                 <a:solidFill>
                   <a:srgbClr val="222222"/>
                 </a:solidFill>
@@ -13085,17 +13190,17 @@
                 <a:spcPct val="100000"/>
               </a:lnSpc>
               <a:spcAft>
-                <a:spcPts val="700"/>
-              </a:spcAft>
-              <a:defRPr sz="2100" b="0">
-                <a:solidFill>
-                  <a:srgbClr val="222222"/>
-                </a:solidFill>
-                <a:latin typeface="Calibri"/>
-              </a:defRPr>
-            </a:pPr>
-            <a:r>
-              <a:rPr sz="2100" b="0">
+                <a:spcPts val="600"/>
+              </a:spcAft>
+              <a:defRPr sz="1800" b="0">
+                <a:solidFill>
+                  <a:srgbClr val="222222"/>
+                </a:solidFill>
+                <a:latin typeface="Calibri"/>
+              </a:defRPr>
+            </a:pPr>
+            <a:r>
+              <a:rPr sz="1800" b="0">
                 <a:solidFill>
                   <a:srgbClr val="222222"/>
                 </a:solidFill>
@@ -13412,21 +13517,21 @@
               <a:spcAft>
                 <a:spcPts val="800"/>
               </a:spcAft>
-              <a:defRPr sz="1900" b="0">
-                <a:solidFill>
-                  <a:srgbClr val="222222"/>
-                </a:solidFill>
-                <a:latin typeface="Calibri"/>
-              </a:defRPr>
-            </a:pPr>
-            <a:r>
-              <a:rPr sz="1900" b="0">
-                <a:solidFill>
-                  <a:srgbClr val="222222"/>
-                </a:solidFill>
-                <a:latin typeface="Calibri"/>
-              </a:rPr>
-              <a:t>1.  Upload it. Nothing moves - this is print only.</a:t>
+              <a:defRPr sz="1800" b="0">
+                <a:solidFill>
+                  <a:srgbClr val="222222"/>
+                </a:solidFill>
+                <a:latin typeface="Calibri"/>
+              </a:defRPr>
+            </a:pPr>
+            <a:r>
+              <a:rPr sz="1800" b="0">
+                <a:solidFill>
+                  <a:srgbClr val="222222"/>
+                </a:solidFill>
+                <a:latin typeface="Calibri"/>
+              </a:rPr>
+              <a:t>1.  Set PS3_MAC_ADDRESS to the number on your controller's sticker. Upload it. Nothing moves - this is print only.</a:t>
             </a:r>
           </a:p>
           <a:p>
@@ -13437,15 +13542,15 @@
               <a:spcAft>
                 <a:spcPts val="800"/>
               </a:spcAft>
-              <a:defRPr sz="1900" b="0">
-                <a:solidFill>
-                  <a:srgbClr val="222222"/>
-                </a:solidFill>
-                <a:latin typeface="Calibri"/>
-              </a:defRPr>
-            </a:pPr>
-            <a:r>
-              <a:rPr sz="1900" b="0">
+              <a:defRPr sz="1800" b="0">
+                <a:solidFill>
+                  <a:srgbClr val="222222"/>
+                </a:solidFill>
+                <a:latin typeface="Calibri"/>
+              </a:defRPr>
+            </a:pPr>
+            <a:r>
+              <a:rPr sz="1800" b="0">
                 <a:solidFill>
                   <a:srgbClr val="222222"/>
                 </a:solidFill>
@@ -13462,15 +13567,15 @@
               <a:spcAft>
                 <a:spcPts val="800"/>
               </a:spcAft>
-              <a:defRPr sz="1900" b="0">
-                <a:solidFill>
-                  <a:srgbClr val="222222"/>
-                </a:solidFill>
-                <a:latin typeface="Calibri"/>
-              </a:defRPr>
-            </a:pPr>
-            <a:r>
-              <a:rPr sz="1900" b="0">
+              <a:defRPr sz="1800" b="0">
+                <a:solidFill>
+                  <a:srgbClr val="222222"/>
+                </a:solidFill>
+                <a:latin typeface="Calibri"/>
+              </a:defRPr>
+            </a:pPr>
+            <a:r>
+              <a:rPr sz="1800" b="0">
                 <a:solidFill>
                   <a:srgbClr val="222222"/>
                 </a:solidFill>
@@ -13487,15 +13592,15 @@
               <a:spcAft>
                 <a:spcPts val="800"/>
               </a:spcAft>
-              <a:defRPr sz="1900" b="0">
-                <a:solidFill>
-                  <a:srgbClr val="222222"/>
-                </a:solidFill>
-                <a:latin typeface="Calibri"/>
-              </a:defRPr>
-            </a:pPr>
-            <a:r>
-              <a:rPr sz="1900" b="0">
+              <a:defRPr sz="1800" b="0">
+                <a:solidFill>
+                  <a:srgbClr val="222222"/>
+                </a:solidFill>
+                <a:latin typeface="Calibri"/>
+              </a:defRPr>
+            </a:pPr>
+            <a:r>
+              <a:rPr sz="1800" b="0">
                 <a:solidFill>
                   <a:srgbClr val="222222"/>
                 </a:solidFill>
@@ -13512,15 +13617,15 @@
               <a:spcAft>
                 <a:spcPts val="800"/>
               </a:spcAft>
-              <a:defRPr sz="1900" b="0">
-                <a:solidFill>
-                  <a:srgbClr val="222222"/>
-                </a:solidFill>
-                <a:latin typeface="Calibri"/>
-              </a:defRPr>
-            </a:pPr>
-            <a:r>
-              <a:rPr sz="1900" b="0">
+              <a:defRPr sz="1800" b="0">
+                <a:solidFill>
+                  <a:srgbClr val="222222"/>
+                </a:solidFill>
+                <a:latin typeface="Calibri"/>
+              </a:defRPr>
+            </a:pPr>
+            <a:r>
+              <a:rPr sz="1800" b="0">
                 <a:solidFill>
                   <a:srgbClr val="222222"/>
                 </a:solidFill>
@@ -13588,7 +13693,7 @@
         <p:spPr>
           <a:xfrm>
             <a:off x="7163537" y="2304288"/>
-            <a:ext cx="4525238" cy="1292958"/>
+            <a:ext cx="4525238" cy="1516072"/>
           </a:xfrm>
           <a:prstGeom prst="rect">
             <a:avLst/>
@@ -13608,21 +13713,21 @@
               <a:spcAft>
                 <a:spcPts val="300"/>
               </a:spcAft>
-              <a:defRPr sz="2500" b="0">
-                <a:solidFill>
-                  <a:srgbClr val="222222"/>
-                </a:solidFill>
-                <a:latin typeface="Calibri"/>
-              </a:defRPr>
-            </a:pPr>
-            <a:r>
-              <a:rPr sz="2500" b="0">
-                <a:solidFill>
-                  <a:srgbClr val="222222"/>
-                </a:solidFill>
-                <a:latin typeface="Calibri"/>
-              </a:rPr>
-              <a:t>Two columns: the raw number from the controller, and the motor speed it turns into.</a:t>
+              <a:defRPr sz="2200" b="0">
+                <a:solidFill>
+                  <a:srgbClr val="222222"/>
+                </a:solidFill>
+                <a:latin typeface="Calibri"/>
+              </a:defRPr>
+            </a:pPr>
+            <a:r>
+              <a:rPr sz="2200" b="0">
+                <a:solidFill>
+                  <a:srgbClr val="222222"/>
+                </a:solidFill>
+                <a:latin typeface="Calibri"/>
+              </a:rPr>
+              <a:t>Two columns: the raw number from the controller, and the motor speed it turns into. A new line only when the stick moves.</a:t>
             </a:r>
           </a:p>
         </p:txBody>
@@ -13635,7 +13740,7 @@
         </p:nvSpPr>
         <p:spPr>
           <a:xfrm>
-            <a:off x="7163537" y="3670398"/>
+            <a:off x="7163537" y="3893512"/>
             <a:ext cx="4525238" cy="365760"/>
           </a:xfrm>
           <a:prstGeom prst="rect">
@@ -13683,8 +13788,8 @@
         </p:nvSpPr>
         <p:spPr>
           <a:xfrm>
-            <a:off x="7163537" y="4072734"/>
-            <a:ext cx="4525238" cy="2190905"/>
+            <a:off x="7163537" y="4295848"/>
+            <a:ext cx="4525238" cy="1967791"/>
           </a:xfrm>
           <a:prstGeom prst="rect">
             <a:avLst/>
@@ -16502,7 +16607,7 @@
                 </a:solidFill>
                 <a:latin typeface="Calibri"/>
               </a:rPr>
-              <a:t>1.  Wheels off the ground. Upload. Check that up is forward and right is right BEFORE you put it down.</a:t>
+              <a:t>1.  Set PS3_MAC_ADDRESS to the number on your controller's sticker. Then wheels off the ground, upload, and check that up is forward and right is right BEFORE you put it down.</a:t>
             </a:r>
           </a:p>
           <a:p>
@@ -17401,7 +17506,7 @@
                 </a:solidFill>
                 <a:latin typeface="Calibri"/>
               </a:rPr>
-              <a:t>5.  Lines 151 and 152: swap the + and the - and drive. What is wrong now?</a:t>
+              <a:t>5.  Lines 168 and 169: swap the + and the - and drive. What is wrong now?</a:t>
             </a:r>
           </a:p>
           <a:p>
@@ -17426,7 +17531,7 @@
                 </a:solidFill>
                 <a:latin typeface="Calibri"/>
               </a:rPr>
-              <a:t>6.  Line 152: make it  rightSpeed = forward;  with no turn term. Why is that worse steering?</a:t>
+              <a:t>6.  Line 169: make it  rightSpeed = forward;  with no turn term. Why is that worse steering?</a:t>
             </a:r>
           </a:p>
         </p:txBody>
@@ -18225,7 +18330,7 @@
         </p:nvGraphicFramePr>
         <p:xfrm>
           <a:off x="502920" y="1188720"/>
-          <a:ext cx="11185854" cy="5073650"/>
+          <a:ext cx="11185854" cy="4895850"/>
         </p:xfrm>
         <a:graphic>
           <a:graphicData uri="http://schemas.openxmlformats.org/drawingml/2006/table">
@@ -18238,14 +18343,14 @@
                 <a:gridCol w="3195958"/>
                 <a:gridCol w="4261278"/>
               </a:tblGrid>
-              <a:tr h="724807">
+              <a:tr h="611981">
                 <a:tc>
                   <a:txBody>
                     <a:bodyPr/>
                     <a:lstStyle/>
                     <a:p>
                       <a:r>
-                        <a:rPr sz="2200" b="1">
+                        <a:rPr sz="1800" b="1">
                           <a:solidFill>
                             <a:srgbClr val="FFFFFF"/>
                           </a:solidFill>
@@ -18267,7 +18372,7 @@
                     <a:lstStyle/>
                     <a:p>
                       <a:r>
-                        <a:rPr sz="2200" b="1">
+                        <a:rPr sz="1800" b="1">
                           <a:solidFill>
                             <a:srgbClr val="FFFFFF"/>
                           </a:solidFill>
@@ -18289,7 +18394,7 @@
                     <a:lstStyle/>
                     <a:p>
                       <a:r>
-                        <a:rPr sz="2200" b="1">
+                        <a:rPr sz="1800" b="1">
                           <a:solidFill>
                             <a:srgbClr val="FFFFFF"/>
                           </a:solidFill>
@@ -18306,14 +18411,14 @@
                   </a:tcPr>
                 </a:tc>
               </a:tr>
-              <a:tr h="724807">
+              <a:tr h="611981">
                 <a:tc>
                   <a:txBody>
                     <a:bodyPr/>
                     <a:lstStyle/>
                     <a:p>
                       <a:r>
-                        <a:rPr sz="2200">
+                        <a:rPr sz="1800">
                           <a:solidFill>
                             <a:srgbClr val="222222"/>
                           </a:solidFill>
@@ -18335,13 +18440,13 @@
                     <a:lstStyle/>
                     <a:p>
                       <a:r>
-                        <a:rPr sz="2200">
+                        <a:rPr sz="1800">
                           <a:solidFill>
                             <a:srgbClr val="222222"/>
                           </a:solidFill>
                           <a:latin typeface="Calibri"/>
                         </a:rPr>
-                        <a:t>Address mismatch</a:t>
+                        <a:t>PS3_MAC_ADDRESS still ends in 00, or is not your number</a:t>
                       </a:r>
                     </a:p>
                   </a:txBody>
@@ -18357,13 +18462,13 @@
                     <a:lstStyle/>
                     <a:p>
                       <a:r>
-                        <a:rPr sz="2200">
+                        <a:rPr sz="1800">
                           <a:solidFill>
                             <a:srgbClr val="222222"/>
                           </a:solidFill>
                           <a:latin typeface="Calibri"/>
                         </a:rPr>
-                        <a:t>Check the address in the sketch matches the pad</a:t>
+                        <a:t>Put the number from your controller's sticker in</a:t>
                       </a:r>
                     </a:p>
                   </a:txBody>
@@ -18374,14 +18479,14 @@
                   </a:tcPr>
                 </a:tc>
               </a:tr>
-              <a:tr h="724807">
+              <a:tr h="611981">
                 <a:tc>
                   <a:txBody>
                     <a:bodyPr/>
                     <a:lstStyle/>
                     <a:p>
                       <a:r>
-                        <a:rPr sz="2200">
+                        <a:rPr sz="1800">
                           <a:solidFill>
                             <a:srgbClr val="222222"/>
                           </a:solidFill>
@@ -18403,7 +18508,7 @@
                     <a:lstStyle/>
                     <a:p>
                       <a:r>
-                        <a:rPr sz="2200">
+                        <a:rPr sz="1800">
                           <a:solidFill>
                             <a:srgbClr val="222222"/>
                           </a:solidFill>
@@ -18425,7 +18530,7 @@
                     <a:lstStyle/>
                     <a:p>
                       <a:r>
-                        <a:rPr sz="2200">
+                        <a:rPr sz="1800">
                           <a:solidFill>
                             <a:srgbClr val="222222"/>
                           </a:solidFill>
@@ -18442,14 +18547,14 @@
                   </a:tcPr>
                 </a:tc>
               </a:tr>
-              <a:tr h="724807">
+              <a:tr h="611981">
                 <a:tc>
                   <a:txBody>
                     <a:bodyPr/>
                     <a:lstStyle/>
                     <a:p>
                       <a:r>
-                        <a:rPr sz="2200">
+                        <a:rPr sz="1800">
                           <a:solidFill>
                             <a:srgbClr val="222222"/>
                           </a:solidFill>
@@ -18471,7 +18576,7 @@
                     <a:lstStyle/>
                     <a:p>
                       <a:r>
-                        <a:rPr sz="2200">
+                        <a:rPr sz="1800">
                           <a:solidFill>
                             <a:srgbClr val="222222"/>
                           </a:solidFill>
@@ -18493,7 +18598,7 @@
                     <a:lstStyle/>
                     <a:p>
                       <a:r>
-                        <a:rPr sz="2200">
+                        <a:rPr sz="1800">
                           <a:solidFill>
                             <a:srgbClr val="222222"/>
                           </a:solidFill>
@@ -18510,14 +18615,14 @@
                   </a:tcPr>
                 </a:tc>
               </a:tr>
-              <a:tr h="724807">
+              <a:tr h="611981">
                 <a:tc>
                   <a:txBody>
                     <a:bodyPr/>
                     <a:lstStyle/>
                     <a:p>
                       <a:r>
-                        <a:rPr sz="2200">
+                        <a:rPr sz="1800">
                           <a:solidFill>
                             <a:srgbClr val="222222"/>
                           </a:solidFill>
@@ -18539,7 +18644,7 @@
                     <a:lstStyle/>
                     <a:p>
                       <a:r>
-                        <a:rPr sz="2200">
+                        <a:rPr sz="1800">
                           <a:solidFill>
                             <a:srgbClr val="222222"/>
                           </a:solidFill>
@@ -18561,7 +18666,7 @@
                     <a:lstStyle/>
                     <a:p>
                       <a:r>
-                        <a:rPr sz="2200">
+                        <a:rPr sz="1800">
                           <a:solidFill>
                             <a:srgbClr val="222222"/>
                           </a:solidFill>
@@ -18578,14 +18683,14 @@
                   </a:tcPr>
                 </a:tc>
               </a:tr>
-              <a:tr h="724807">
+              <a:tr h="611981">
                 <a:tc>
                   <a:txBody>
                     <a:bodyPr/>
                     <a:lstStyle/>
                     <a:p>
                       <a:r>
-                        <a:rPr sz="2200">
+                        <a:rPr sz="1800">
                           <a:solidFill>
                             <a:srgbClr val="222222"/>
                           </a:solidFill>
@@ -18607,7 +18712,7 @@
                     <a:lstStyle/>
                     <a:p>
                       <a:r>
-                        <a:rPr sz="2200">
+                        <a:rPr sz="1800">
                           <a:solidFill>
                             <a:srgbClr val="222222"/>
                           </a:solidFill>
@@ -18629,7 +18734,7 @@
                     <a:lstStyle/>
                     <a:p>
                       <a:r>
-                        <a:rPr sz="2200">
+                        <a:rPr sz="1800">
                           <a:solidFill>
                             <a:srgbClr val="222222"/>
                           </a:solidFill>
@@ -18646,14 +18751,14 @@
                   </a:tcPr>
                 </a:tc>
               </a:tr>
-              <a:tr h="724808">
+              <a:tr h="611981">
                 <a:tc>
                   <a:txBody>
                     <a:bodyPr/>
                     <a:lstStyle/>
                     <a:p>
                       <a:r>
-                        <a:rPr sz="2200">
+                        <a:rPr sz="1800">
                           <a:solidFill>
                             <a:srgbClr val="222222"/>
                           </a:solidFill>
@@ -18675,7 +18780,7 @@
                     <a:lstStyle/>
                     <a:p>
                       <a:r>
-                        <a:rPr sz="2200">
+                        <a:rPr sz="1800">
                           <a:solidFill>
                             <a:srgbClr val="222222"/>
                           </a:solidFill>
@@ -18697,7 +18802,7 @@
                     <a:lstStyle/>
                     <a:p>
                       <a:r>
-                        <a:rPr sz="2200">
+                        <a:rPr sz="1800">
                           <a:solidFill>
                             <a:srgbClr val="222222"/>
                           </a:solidFill>
@@ -18710,6 +18815,74 @@
                   <a:tcPr marL="73152" marT="18288" marB="18288">
                     <a:solidFill>
                       <a:srgbClr val="EEF3F8"/>
+                    </a:solidFill>
+                  </a:tcPr>
+                </a:tc>
+              </a:tr>
+              <a:tr h="611983">
+                <a:tc>
+                  <a:txBody>
+                    <a:bodyPr/>
+                    <a:lstStyle/>
+                    <a:p>
+                      <a:r>
+                        <a:rPr sz="1800">
+                          <a:solidFill>
+                            <a:srgbClr val="222222"/>
+                          </a:solidFill>
+                          <a:latin typeface="Consolas"/>
+                        </a:rPr>
+                        <a:t>Compile error: esp_base_mac_addr_set</a:t>
+                      </a:r>
+                    </a:p>
+                  </a:txBody>
+                  <a:tcPr marL="73152" marT="18288" marB="18288">
+                    <a:solidFill>
+                      <a:srgbClr val="FFFFFF"/>
+                    </a:solidFill>
+                  </a:tcPr>
+                </a:tc>
+                <a:tc>
+                  <a:txBody>
+                    <a:bodyPr/>
+                    <a:lstStyle/>
+                    <a:p>
+                      <a:r>
+                        <a:rPr sz="1800">
+                          <a:solidFill>
+                            <a:srgbClr val="222222"/>
+                          </a:solidFill>
+                          <a:latin typeface="Calibri"/>
+                        </a:rPr>
+                        <a:t>The ORIGINAL PS3 library is installed</a:t>
+                      </a:r>
+                    </a:p>
+                  </a:txBody>
+                  <a:tcPr marL="73152" marT="18288" marB="18288">
+                    <a:solidFill>
+                      <a:srgbClr val="FFFFFF"/>
+                    </a:solidFill>
+                  </a:tcPr>
+                </a:tc>
+                <a:tc>
+                  <a:txBody>
+                    <a:bodyPr/>
+                    <a:lstStyle/>
+                    <a:p>
+                      <a:r>
+                        <a:rPr sz="1800">
+                          <a:solidFill>
+                            <a:srgbClr val="222222"/>
+                          </a:solidFill>
+                          <a:latin typeface="Calibri"/>
+                        </a:rPr>
+                        <a:t>Uninstall it; keep only the Fork</a:t>
+                      </a:r>
+                    </a:p>
+                  </a:txBody>
+                  <a:tcPr marL="73152" marT="18288" marB="18288">
+                    <a:solidFill>
+                      <a:srgbClr val="FFFFFF"/>
                     </a:solidFill>
                   </a:tcPr>
                 </a:tc>
@@ -21051,21 +21224,21 @@
               <a:spcAft>
                 <a:spcPts val="600"/>
               </a:spcAft>
-              <a:defRPr sz="2000" b="0">
-                <a:solidFill>
-                  <a:srgbClr val="222222"/>
-                </a:solidFill>
-                <a:latin typeface="Calibri"/>
-              </a:defRPr>
-            </a:pPr>
-            <a:r>
-              <a:rPr sz="2000" b="0">
-                <a:solidFill>
-                  <a:srgbClr val="222222"/>
-                </a:solidFill>
-                <a:latin typeface="Calibri"/>
-              </a:rPr>
-              <a:t>A PS3 controller has no discovery mode. It talks to ONE vehicle and no other, and that is decided before you get it - we program and label every pad and every vehicle before the lesson.</a:t>
+              <a:defRPr sz="1800" b="0">
+                <a:solidFill>
+                  <a:srgbClr val="222222"/>
+                </a:solidFill>
+                <a:latin typeface="Calibri"/>
+              </a:defRPr>
+            </a:pPr>
+            <a:r>
+              <a:rPr sz="1800" b="0">
+                <a:solidFill>
+                  <a:srgbClr val="222222"/>
+                </a:solidFill>
+                <a:latin typeface="Calibri"/>
+              </a:rPr>
+              <a:t>A PS3 controller has no discovery mode. It talks to ONE Bluetooth address and no other - we program and label every pad before the lesson.</a:t>
             </a:r>
           </a:p>
           <a:p>
@@ -21076,7 +21249,7 @@
               <a:spcAft>
                 <a:spcPts val="600"/>
               </a:spcAft>
-              <a:defRPr sz="1000" b="0">
+              <a:defRPr sz="900" b="0">
                 <a:solidFill>
                   <a:srgbClr val="222222"/>
                 </a:solidFill>
@@ -21092,21 +21265,21 @@
               <a:spcAft>
                 <a:spcPts val="600"/>
               </a:spcAft>
-              <a:defRPr sz="2000" b="0">
-                <a:solidFill>
-                  <a:srgbClr val="222222"/>
-                </a:solidFill>
-                <a:latin typeface="Calibri"/>
-              </a:defRPr>
-            </a:pPr>
-            <a:r>
-              <a:rPr sz="2000" b="0">
-                <a:solidFill>
-                  <a:srgbClr val="222222"/>
-                </a:solidFill>
-                <a:latin typeface="Calibri"/>
-              </a:rPr>
-              <a:t>So all you have to do is match the stickers.</a:t>
+              <a:defRPr sz="1800" b="0">
+                <a:solidFill>
+                  <a:srgbClr val="222222"/>
+                </a:solidFill>
+                <a:latin typeface="Calibri"/>
+              </a:defRPr>
+            </a:pPr>
+            <a:r>
+              <a:rPr sz="1800" b="0">
+                <a:solidFill>
+                  <a:srgbClr val="222222"/>
+                </a:solidFill>
+                <a:latin typeface="Calibri"/>
+              </a:rPr>
+              <a:t>The number on your pad's sticker is the end of that address:</a:t>
             </a:r>
           </a:p>
           <a:p>
@@ -21117,21 +21290,62 @@
               <a:spcAft>
                 <a:spcPts val="600"/>
               </a:spcAft>
-              <a:defRPr sz="2000" b="0">
-                <a:solidFill>
-                  <a:srgbClr val="222222"/>
-                </a:solidFill>
-                <a:latin typeface="Calibri"/>
-              </a:defRPr>
-            </a:pPr>
-            <a:r>
-              <a:rPr sz="2000" b="0">
-                <a:solidFill>
-                  <a:srgbClr val="222222"/>
-                </a:solidFill>
-                <a:latin typeface="Calibri"/>
-              </a:rPr>
-              <a:t>The sticker on the pad and the sticker on the vehicle carry the same number.</a:t>
+              <a:defRPr sz="1800" b="0">
+                <a:solidFill>
+                  <a:srgbClr val="222222"/>
+                </a:solidFill>
+                <a:latin typeface="Calibri"/>
+              </a:defRPr>
+            </a:pPr>
+            <a:r>
+              <a:rPr sz="1800" b="0">
+                <a:solidFill>
+                  <a:srgbClr val="222222"/>
+                </a:solidFill>
+                <a:latin typeface="Calibri"/>
+              </a:rPr>
+              <a:t>02:02:03:04:05:NN      NN = the number on the sticker</a:t>
+            </a:r>
+          </a:p>
+          <a:p>
+            <a:pPr algn="l">
+              <a:lnSpc>
+                <a:spcPct val="100000"/>
+              </a:lnSpc>
+              <a:spcAft>
+                <a:spcPts val="600"/>
+              </a:spcAft>
+              <a:defRPr sz="900" b="0">
+                <a:solidFill>
+                  <a:srgbClr val="222222"/>
+                </a:solidFill>
+                <a:latin typeface="Calibri"/>
+              </a:defRPr>
+            </a:pPr>
+          </a:p>
+          <a:p>
+            <a:pPr algn="l">
+              <a:lnSpc>
+                <a:spcPct val="100000"/>
+              </a:lnSpc>
+              <a:spcAft>
+                <a:spcPts val="600"/>
+              </a:spcAft>
+              <a:defRPr sz="1800" b="0">
+                <a:solidFill>
+                  <a:srgbClr val="222222"/>
+                </a:solidFill>
+                <a:latin typeface="Calibri"/>
+              </a:defRPr>
+            </a:pPr>
+            <a:r>
+              <a:rPr sz="1800" b="0">
+                <a:solidFill>
+                  <a:srgbClr val="222222"/>
+                </a:solidFill>
+                <a:latin typeface="Calibri"/>
+              </a:rPr>
+              <a:t>YOU put it into every program that uses the controller, near the top:</a:t>
             </a:r>
           </a:p>
           <a:p>
@@ -21142,46 +21356,46 @@
               <a:spcAft>
                 <a:spcPts val="600"/>
               </a:spcAft>
-              <a:defRPr sz="2000" b="0">
-                <a:solidFill>
-                  <a:srgbClr val="222222"/>
-                </a:solidFill>
-                <a:latin typeface="Calibri"/>
-              </a:defRPr>
-            </a:pPr>
-            <a:r>
-              <a:rPr sz="2000" b="0">
-                <a:solidFill>
-                  <a:srgbClr val="222222"/>
-                </a:solidFill>
-                <a:latin typeface="Calibri"/>
-              </a:rPr>
-              <a:t>Same number, they work together. Different numbers, nothing happens at all.</a:t>
-            </a:r>
-          </a:p>
-          <a:p>
-            <a:pPr lvl="1" algn="l">
+              <a:defRPr sz="1800" b="0">
+                <a:solidFill>
+                  <a:srgbClr val="222222"/>
+                </a:solidFill>
+                <a:latin typeface="Calibri"/>
+              </a:defRPr>
+            </a:pPr>
+            <a:r>
+              <a:rPr sz="1800" b="0">
+                <a:solidFill>
+                  <a:srgbClr val="222222"/>
+                </a:solidFill>
+                <a:latin typeface="Calibri"/>
+              </a:rPr>
+              <a:t>const char *PS3_MAC_ADDRESS = "02:02:03:04:05:00";</a:t>
+            </a:r>
+          </a:p>
+          <a:p>
+            <a:pPr algn="l">
               <a:lnSpc>
                 <a:spcPct val="100000"/>
               </a:lnSpc>
               <a:spcAft>
                 <a:spcPts val="600"/>
               </a:spcAft>
-              <a:defRPr sz="2000" b="0">
-                <a:solidFill>
-                  <a:srgbClr val="222222"/>
-                </a:solidFill>
-                <a:latin typeface="Calibri"/>
-              </a:defRPr>
-            </a:pPr>
-            <a:r>
-              <a:rPr sz="2000" b="0">
-                <a:solidFill>
-                  <a:srgbClr val="222222"/>
-                </a:solidFill>
-                <a:latin typeface="Calibri"/>
-              </a:rPr>
-              <a:t>If your pad will not connect, check the stickers before you check anything else.</a:t>
+              <a:defRPr sz="1800" b="0">
+                <a:solidFill>
+                  <a:srgbClr val="222222"/>
+                </a:solidFill>
+                <a:latin typeface="Calibri"/>
+              </a:defRPr>
+            </a:pPr>
+            <a:r>
+              <a:rPr sz="1800" b="0">
+                <a:solidFill>
+                  <a:srgbClr val="222222"/>
+                </a:solidFill>
+                <a:latin typeface="Calibri"/>
+              </a:rPr>
+              <a:t>Change the 00 to your number. Left at 00, nothing connects - so a forgotten edit can never drive somebody else's vehicle.</a:t>
             </a:r>
           </a:p>
           <a:p>
@@ -21192,7 +21406,7 @@
               <a:spcAft>
                 <a:spcPts val="600"/>
               </a:spcAft>
-              <a:defRPr sz="1000" b="0">
+              <a:defRPr sz="900" b="0">
                 <a:solidFill>
                   <a:srgbClr val="222222"/>
                 </a:solidFill>
@@ -21208,21 +21422,21 @@
               <a:spcAft>
                 <a:spcPts val="600"/>
               </a:spcAft>
-              <a:defRPr sz="2000" b="0">
-                <a:solidFill>
-                  <a:srgbClr val="222222"/>
-                </a:solidFill>
-                <a:latin typeface="Calibri"/>
-              </a:defRPr>
-            </a:pPr>
-            <a:r>
-              <a:rPr sz="2000" b="0">
-                <a:solidFill>
-                  <a:srgbClr val="222222"/>
-                </a:solidFill>
-                <a:latin typeface="Calibri"/>
-              </a:rPr>
-              <a:t>The number is really a Bluetooth address written into both the pad and the sketch. You do not have to set it, but it is worth knowing that is what the sticker stands for.</a:t>
+              <a:defRPr sz="1800" b="0">
+                <a:solidFill>
+                  <a:srgbClr val="222222"/>
+                </a:solidFill>
+                <a:latin typeface="Calibri"/>
+              </a:defRPr>
+            </a:pPr>
+            <a:r>
+              <a:rPr sz="1800" b="0">
+                <a:solidFill>
+                  <a:srgbClr val="222222"/>
+                </a:solidFill>
+                <a:latin typeface="Calibri"/>
+              </a:rPr>
+              <a:t>Pad will not connect? Check the number in the sketch against the sticker before anything else.</a:t>
             </a:r>
           </a:p>
         </p:txBody>
@@ -21288,7 +21502,7 @@
                 </a:solidFill>
                 <a:latin typeface="Calibri"/>
               </a:rPr>
-              <a:t>Do not swap pads between vehicles. A pad only ever drives the vehicle with the same number on it.</a:t>
+              <a:t>Every program that uses the controller has a CHANGE THIS BEFORE YOU UPLOAD block. Look for it before every upload.</a:t>
             </a:r>
           </a:p>
         </p:txBody>

--- a/ground-vehicle/docs/courses/beginner-ps3/l3_controller_programming.pptx
+++ b/ground-vehicle/docs/courses/beginner-ps3/l3_controller_programming.pptx
@@ -17506,7 +17506,7 @@
                 </a:solidFill>
                 <a:latin typeface="Calibri"/>
               </a:rPr>
-              <a:t>5.  Lines 168 and 169: swap the + and the - and drive. What is wrong now?</a:t>
+              <a:t>5.  Lines 173 and 174: swap the + and the - and drive. What is wrong now?</a:t>
             </a:r>
           </a:p>
           <a:p>
@@ -17531,7 +17531,7 @@
                 </a:solidFill>
                 <a:latin typeface="Calibri"/>
               </a:rPr>
-              <a:t>6.  Line 169: make it  rightSpeed = forward;  with no turn term. Why is that worse steering?</a:t>
+              <a:t>6.  Line 174: make it  rightSpeed = forward;  with no turn term. Why is that worse steering?</a:t>
             </a:r>
           </a:p>
         </p:txBody>
